--- a/tasks/finalpool/notion-team-survey-report/groundtruth_workspace/Team_Report.pptx
+++ b/tasks/finalpool/notion-team-survey-report/groundtruth_workspace/Team_Report.pptx
@@ -10,9 +10,6 @@
     <p:sldId id="258" r:id="rId9"/>
     <p:sldId id="259" r:id="rId10"/>
     <p:sldId id="260" r:id="rId11"/>
-    <p:sldId id="261" r:id="rId12"/>
-    <p:sldId id="262" r:id="rId13"/>
-    <p:sldId id="263" r:id="rId14"/>
   </p:sldIdLst>
   <p:sldSz cx="9144000" cy="6858000" type="screen4x3"/>
   <p:notesSz cx="6858000" cy="9144000"/>
@@ -3111,7 +3108,7 @@
           <a:lstStyle/>
           <a:p>
             <a:r>
-              <a:t>Team Satisfaction Survey Results - Q1 2026</a:t>
+              <a:t>Engineering Team Quarterly Report</a:t>
             </a:r>
           </a:p>
         </p:txBody>
@@ -3132,7 +3129,7 @@
           <a:lstStyle/>
           <a:p>
             <a:r>
-              <a:t>People Operations Team</a:t>
+              <a:t>People Operations Team — Q1 2026 Review</a:t>
             </a:r>
           </a:p>
         </p:txBody>
@@ -3171,7 +3168,7 @@
           <a:lstStyle/>
           <a:p>
             <a:r>
-              <a:t>Alpha Team Results</a:t>
+              <a:t>Project Status Summary</a:t>
             </a:r>
           </a:p>
         </p:txBody>
@@ -3192,32 +3189,27 @@
           <a:lstStyle/>
           <a:p>
             <a:r>
-              <a:t>Average Satisfaction: 3.0</a:t>
-            </a:r>
-          </a:p>
-          <a:p>
-            <a:r>
-              <a:t>Average Workload: 4.0</a:t>
-            </a:r>
-          </a:p>
-          <a:p>
-            <a:r>
-              <a:t>Average Collaboration: 4.0</a:t>
-            </a:r>
-          </a:p>
-          <a:p>
-            <a:r>
-              <a:t>Average Management Support: 3.5</a:t>
-            </a:r>
-          </a:p>
-          <a:p>
-            <a:r>
-              <a:t>Overall Score: 3.62</a:t>
-            </a:r>
-          </a:p>
-          <a:p>
-            <a:r>
-              <a:t>Responses: 2</a:t>
+              <a:t>Total projects: 5</a:t>
+            </a:r>
+          </a:p>
+          <a:p>
+            <a:r>
+              <a:t>Active: 2 (Project Alpha, Project Gamma)</a:t>
+            </a:r>
+          </a:p>
+          <a:p>
+            <a:r>
+              <a:t>Completed: 1 (Project Beta)</a:t>
+            </a:r>
+          </a:p>
+          <a:p>
+            <a:r>
+              <a:t>On Hold: 1 (Project Delta)</a:t>
+            </a:r>
+          </a:p>
+          <a:p>
+            <a:r>
+              <a:t>Planning: 1 (Project Epsilon)</a:t>
             </a:r>
           </a:p>
         </p:txBody>
@@ -3256,7 +3248,7 @@
           <a:lstStyle/>
           <a:p>
             <a:r>
-              <a:t>Beta Team Results</a:t>
+              <a:t>Survey Results - Average Scores</a:t>
             </a:r>
           </a:p>
         </p:txBody>
@@ -3277,32 +3269,22 @@
           <a:lstStyle/>
           <a:p>
             <a:r>
-              <a:t>Average Satisfaction: 3.5</a:t>
-            </a:r>
-          </a:p>
-          <a:p>
-            <a:r>
-              <a:t>Average Workload: 3.5</a:t>
-            </a:r>
-          </a:p>
-          <a:p>
-            <a:r>
-              <a:t>Average Collaboration: 3.5</a:t>
-            </a:r>
-          </a:p>
-          <a:p>
-            <a:r>
-              <a:t>Average Management Support: 3.5</a:t>
-            </a:r>
-          </a:p>
-          <a:p>
-            <a:r>
-              <a:t>Overall Score: 3.5</a:t>
-            </a:r>
-          </a:p>
-          <a:p>
-            <a:r>
-              <a:t>Responses: 2</a:t>
+              <a:t>Leadership: 3.500</a:t>
+            </a:r>
+          </a:p>
+          <a:p>
+            <a:r>
+              <a:t>Workload: 3.500</a:t>
+            </a:r>
+          </a:p>
+          <a:p>
+            <a:r>
+              <a:t>Communication: 3.625</a:t>
+            </a:r>
+          </a:p>
+          <a:p>
+            <a:r>
+              <a:t>Growth: 3.500</a:t>
             </a:r>
           </a:p>
         </p:txBody>
@@ -3341,7 +3323,7 @@
           <a:lstStyle/>
           <a:p>
             <a:r>
-              <a:t>Delta Team Results</a:t>
+              <a:t>Key Findings</a:t>
             </a:r>
           </a:p>
         </p:txBody>
@@ -3362,32 +3344,22 @@
           <a:lstStyle/>
           <a:p>
             <a:r>
-              <a:t>Average Satisfaction: 3.0</a:t>
-            </a:r>
-          </a:p>
-          <a:p>
-            <a:r>
-              <a:t>Average Workload: 3.5</a:t>
-            </a:r>
-          </a:p>
-          <a:p>
-            <a:r>
-              <a:t>Average Collaboration: 3.0</a:t>
-            </a:r>
-          </a:p>
-          <a:p>
-            <a:r>
-              <a:t>Average Management Support: 2.5</a:t>
-            </a:r>
-          </a:p>
-          <a:p>
-            <a:r>
-              <a:t>Overall Score: 3.0</a:t>
-            </a:r>
-          </a:p>
-          <a:p>
-            <a:r>
-              <a:t>Responses: 2</a:t>
+              <a:t>Communication scored highest (3.625) — team practices are working.</a:t>
+            </a:r>
+          </a:p>
+          <a:p>
+            <a:r>
+              <a:t>Leadership, Workload, Growth all tied at 3.5 — moderate satisfaction.</a:t>
+            </a:r>
+          </a:p>
+          <a:p>
+            <a:r>
+              <a:t>All four dimensions cluster near the midpoint, indicating no severe pain points.</a:t>
+            </a:r>
+          </a:p>
+          <a:p>
+            <a:r>
+              <a:t>5 projects across Active / Completed / On Hold / Planning statuses.</a:t>
             </a:r>
           </a:p>
         </p:txBody>
@@ -3426,7 +3398,7 @@
           <a:lstStyle/>
           <a:p>
             <a:r>
-              <a:t>Epsilon Team Results</a:t>
+              <a:t>Recommendations</a:t>
             </a:r>
           </a:p>
         </p:txBody>
@@ -3447,284 +3419,22 @@
           <a:lstStyle/>
           <a:p>
             <a:r>
-              <a:t>Average Satisfaction: 4.0</a:t>
-            </a:r>
-          </a:p>
-          <a:p>
-            <a:r>
-              <a:t>Average Workload: 3.5</a:t>
-            </a:r>
-          </a:p>
-          <a:p>
-            <a:r>
-              <a:t>Average Collaboration: 4.0</a:t>
-            </a:r>
-          </a:p>
-          <a:p>
-            <a:r>
-              <a:t>Average Management Support: 4.0</a:t>
-            </a:r>
-          </a:p>
-          <a:p>
-            <a:r>
-              <a:t>Overall Score: 3.88</a:t>
-            </a:r>
-          </a:p>
-          <a:p>
-            <a:r>
-              <a:t>Responses: 2</a:t>
-            </a:r>
-          </a:p>
-        </p:txBody>
-      </p:sp>
-    </p:spTree>
-  </p:cSld>
-  <p:clrMapOvr>
-    <a:masterClrMapping/>
-  </p:clrMapOvr>
-</p:sld>
-</file>
-
-<file path=ppt/slides/slide6.xml><?xml version="1.0" encoding="utf-8"?>
-<p:sld xmlns:a="http://schemas.openxmlformats.org/drawingml/2006/main" xmlns:p="http://schemas.openxmlformats.org/presentationml/2006/main" xmlns:r="http://schemas.openxmlformats.org/officeDocument/2006/relationships">
-  <p:cSld>
-    <p:spTree>
-      <p:nvGrpSpPr>
-        <p:cNvPr id="1" name=""/>
-        <p:cNvGrpSpPr/>
-        <p:nvPr/>
-      </p:nvGrpSpPr>
-      <p:grpSpPr/>
-      <p:sp>
-        <p:nvSpPr>
-          <p:cNvPr id="2" name="Title 1"/>
-          <p:cNvSpPr>
-            <a:spLocks noGrp="1"/>
-          </p:cNvSpPr>
-          <p:nvPr>
-            <p:ph type="title"/>
-          </p:nvPr>
-        </p:nvSpPr>
-        <p:spPr/>
-        <p:txBody>
-          <a:bodyPr/>
-          <a:lstStyle/>
-          <a:p>
-            <a:r>
-              <a:t>Gamma Team Results</a:t>
-            </a:r>
-          </a:p>
-        </p:txBody>
-      </p:sp>
-      <p:sp>
-        <p:nvSpPr>
-          <p:cNvPr id="3" name="Content Placeholder 2"/>
-          <p:cNvSpPr>
-            <a:spLocks noGrp="1"/>
-          </p:cNvSpPr>
-          <p:nvPr>
-            <p:ph idx="1"/>
-          </p:nvPr>
-        </p:nvSpPr>
-        <p:spPr/>
-        <p:txBody>
-          <a:bodyPr/>
-          <a:lstStyle/>
-          <a:p>
-            <a:r>
-              <a:t>Average Satisfaction: 4.0</a:t>
-            </a:r>
-          </a:p>
-          <a:p>
-            <a:r>
-              <a:t>Average Workload: 3.0</a:t>
-            </a:r>
-          </a:p>
-          <a:p>
-            <a:r>
-              <a:t>Average Collaboration: 3.5</a:t>
-            </a:r>
-          </a:p>
-          <a:p>
-            <a:r>
-              <a:t>Average Management Support: 4.0</a:t>
-            </a:r>
-          </a:p>
-          <a:p>
-            <a:r>
-              <a:t>Overall Score: 3.62</a:t>
-            </a:r>
-          </a:p>
-          <a:p>
-            <a:r>
-              <a:t>Responses: 2</a:t>
-            </a:r>
-          </a:p>
-        </p:txBody>
-      </p:sp>
-    </p:spTree>
-  </p:cSld>
-  <p:clrMapOvr>
-    <a:masterClrMapping/>
-  </p:clrMapOvr>
-</p:sld>
-</file>
-
-<file path=ppt/slides/slide7.xml><?xml version="1.0" encoding="utf-8"?>
-<p:sld xmlns:a="http://schemas.openxmlformats.org/drawingml/2006/main" xmlns:p="http://schemas.openxmlformats.org/presentationml/2006/main" xmlns:r="http://schemas.openxmlformats.org/officeDocument/2006/relationships">
-  <p:cSld>
-    <p:spTree>
-      <p:nvGrpSpPr>
-        <p:cNvPr id="1" name=""/>
-        <p:cNvGrpSpPr/>
-        <p:nvPr/>
-      </p:nvGrpSpPr>
-      <p:grpSpPr/>
-      <p:sp>
-        <p:nvSpPr>
-          <p:cNvPr id="2" name="Title 1"/>
-          <p:cNvSpPr>
-            <a:spLocks noGrp="1"/>
-          </p:cNvSpPr>
-          <p:nvPr>
-            <p:ph type="title"/>
-          </p:nvPr>
-        </p:nvSpPr>
-        <p:spPr/>
-        <p:txBody>
-          <a:bodyPr/>
-          <a:lstStyle/>
-          <a:p>
-            <a:r>
-              <a:t>Company-Wide Summary</a:t>
-            </a:r>
-          </a:p>
-        </p:txBody>
-      </p:sp>
-      <p:sp>
-        <p:nvSpPr>
-          <p:cNvPr id="3" name="Content Placeholder 2"/>
-          <p:cNvSpPr>
-            <a:spLocks noGrp="1"/>
-          </p:cNvSpPr>
-          <p:nvPr>
-            <p:ph idx="1"/>
-          </p:nvPr>
-        </p:nvSpPr>
-        <p:spPr/>
-        <p:txBody>
-          <a:bodyPr/>
-          <a:lstStyle/>
-          <a:p>
-            <a:r>
-              <a:t>Satisfaction: 3.5</a:t>
-            </a:r>
-          </a:p>
-          <a:p>
-            <a:r>
-              <a:t>Workload: 3.5</a:t>
-            </a:r>
-          </a:p>
-          <a:p>
-            <a:r>
-              <a:t>Collaboration: 3.6</a:t>
-            </a:r>
-          </a:p>
-          <a:p>
-            <a:r>
-              <a:t>Management_Support: 3.5</a:t>
-            </a:r>
-          </a:p>
-          <a:p>
-            <a:r>
-              <a:t>Overall_Score: 3.52</a:t>
-            </a:r>
-          </a:p>
-        </p:txBody>
-      </p:sp>
-    </p:spTree>
-  </p:cSld>
-  <p:clrMapOvr>
-    <a:masterClrMapping/>
-  </p:clrMapOvr>
-</p:sld>
-</file>
-
-<file path=ppt/slides/slide8.xml><?xml version="1.0" encoding="utf-8"?>
-<p:sld xmlns:a="http://schemas.openxmlformats.org/drawingml/2006/main" xmlns:p="http://schemas.openxmlformats.org/presentationml/2006/main" xmlns:r="http://schemas.openxmlformats.org/officeDocument/2006/relationships">
-  <p:cSld>
-    <p:spTree>
-      <p:nvGrpSpPr>
-        <p:cNvPr id="1" name=""/>
-        <p:cNvGrpSpPr/>
-        <p:nvPr/>
-      </p:nvGrpSpPr>
-      <p:grpSpPr/>
-      <p:sp>
-        <p:nvSpPr>
-          <p:cNvPr id="2" name="Title 1"/>
-          <p:cNvSpPr>
-            <a:spLocks noGrp="1"/>
-          </p:cNvSpPr>
-          <p:nvPr>
-            <p:ph type="title"/>
-          </p:nvPr>
-        </p:nvSpPr>
-        <p:spPr/>
-        <p:txBody>
-          <a:bodyPr/>
-          <a:lstStyle/>
-          <a:p>
-            <a:r>
-              <a:t>Recommendations</a:t>
-            </a:r>
-          </a:p>
-        </p:txBody>
-      </p:sp>
-      <p:sp>
-        <p:nvSpPr>
-          <p:cNvPr id="3" name="Content Placeholder 2"/>
-          <p:cNvSpPr>
-            <a:spLocks noGrp="1"/>
-          </p:cNvSpPr>
-          <p:nvPr>
-            <p:ph idx="1"/>
-          </p:nvPr>
-        </p:nvSpPr>
-        <p:spPr/>
-        <p:txBody>
-          <a:bodyPr/>
-          <a:lstStyle/>
-          <a:p>
-            <a:r>
-              <a:t>The Delta team has the lowest overall satisfaction score (3.0) and requires immediate attention.</a:t>
-            </a:r>
-          </a:p>
-          <a:p/>
-          <a:p>
-            <a:r>
-              <a:t>Key areas of concern include workload management and management support.</a:t>
-            </a:r>
-          </a:p>
-          <a:p/>
-          <a:p>
-            <a:r>
-              <a:t>Recommended actions:</a:t>
-            </a:r>
-          </a:p>
-          <a:p>
-            <a:r>
-              <a:t>- Conduct follow-up interviews with Delta team members</a:t>
-            </a:r>
-          </a:p>
-          <a:p>
-            <a:r>
-              <a:t>- Review resource allocation and staffing levels</a:t>
-            </a:r>
-          </a:p>
-          <a:p>
-            <a:r>
-              <a:t>- Increase management check-ins and support frequency</a:t>
+              <a:t>Investigate Workload distribution to address moderate scores.</a:t>
+            </a:r>
+          </a:p>
+          <a:p>
+            <a:r>
+              <a:t>Boost growth opportunities (training budget, mentorship program).</a:t>
+            </a:r>
+          </a:p>
+          <a:p>
+            <a:r>
+              <a:t>Review On Hold project (Project Delta) for stakeholder alignment.</a:t>
+            </a:r>
+          </a:p>
+          <a:p>
+            <a:r>
+              <a:t>Recommendation: schedule follow-up survey in 90 days to track impact.</a:t>
             </a:r>
           </a:p>
         </p:txBody>
